--- a/CapstoneEcommerceSegmentation/reports/Capstone_Ecommerce_Segmentation.pptx
+++ b/CapstoneEcommerceSegmentation/reports/Capstone_Ecommerce_Segmentation.pptx
@@ -18633,7 +18633,7 @@
         <p:spPr>
           <a:xfrm>
             <a:off x="914400" y="4343400"/>
-            <a:ext cx="10360152" cy="365760"/>
+            <a:ext cx="10360152" cy="215444"/>
           </a:xfrm>
           <a:prstGeom prst="rect">
             <a:avLst/>
@@ -18648,14 +18648,47 @@
           <a:p>
             <a:pPr algn="ctr"/>
             <a:r>
-              <a:rPr sz="1400" b="0" i="0">
+              <a:rPr sz="1400" b="0" i="0" dirty="0">
                 <a:solidFill>
                   <a:srgbClr val="B9C2E6"/>
                 </a:solidFill>
                 <a:latin typeface="Calibri"/>
               </a:rPr>
-              <a:t>Capstone Project  ·  [Presenter name]  ·  [Date]</a:t>
-            </a:r>
+              <a:t>Capstone Project  ·  </a:t>
+            </a:r>
+            <a:r>
+              <a:rPr lang="en-IN" sz="1400" b="0" i="0" dirty="0">
+                <a:solidFill>
+                  <a:srgbClr val="B9C2E6"/>
+                </a:solidFill>
+                <a:latin typeface="Calibri"/>
+              </a:rPr>
+              <a:t>Swastik Mukherjee </a:t>
+            </a:r>
+            <a:r>
+              <a:rPr sz="1400" b="0" i="0" dirty="0">
+                <a:solidFill>
+                  <a:srgbClr val="B9C2E6"/>
+                </a:solidFill>
+                <a:latin typeface="Calibri"/>
+              </a:rPr>
+              <a:t>·  </a:t>
+            </a:r>
+            <a:r>
+              <a:rPr lang="en-IN" sz="1400" b="0" i="0">
+                <a:solidFill>
+                  <a:srgbClr val="B9C2E6"/>
+                </a:solidFill>
+                <a:latin typeface="Calibri"/>
+              </a:rPr>
+              <a:t>29/09/2026</a:t>
+            </a:r>
+            <a:endParaRPr sz="1400" b="0" i="0" dirty="0">
+              <a:solidFill>
+                <a:srgbClr val="B9C2E6"/>
+              </a:solidFill>
+              <a:latin typeface="Calibri"/>
+            </a:endParaRPr>
           </a:p>
         </p:txBody>
       </p:sp>
